--- a/docs/quickguides/en/vans/pptx/10_Quick_Guide_oneSCM_Vertraege_im_Alltag_verwalten_EN.pptx
+++ b/docs/quickguides/en/vans/pptx/10_Quick_Guide_oneSCM_Vertraege_im_Alltag_verwalten_EN.pptx
@@ -1503,7 +1503,7 @@
                 <a:ea typeface="MB Corpo S Text Office" pitchFamily="34" charset="-122"/>
                 <a:cs typeface="MB Corpo S Text Office" pitchFamily="34" charset="-120"/>
               </a:rPr>
-              <a:t>This document is interactive – references to handbook chapters and systems are provided as links.</a:t>
+              <a:t>References to handbook chapters and systems are highlighted; e-mail addresses are provided as links.</a:t>
             </a:r>
             <a:endParaRPr lang="en-US" sz="900" dirty="0"/>
           </a:p>
@@ -1557,7 +1557,7 @@
         <p:spPr>
           <a:xfrm>
             <a:off x="201168" y="2962656"/>
-            <a:ext cx="2240280" cy="1472184"/>
+            <a:ext cx="2240280" cy="1773936"/>
           </a:xfrm>
           <a:prstGeom prst="rect">
             <a:avLst/>
@@ -1683,7 +1683,7 @@
         <p:spPr>
           <a:xfrm>
             <a:off x="2624328" y="2962656"/>
-            <a:ext cx="2240280" cy="1472184"/>
+            <a:ext cx="2240280" cy="1773936"/>
           </a:xfrm>
           <a:prstGeom prst="rect">
             <a:avLst/>
@@ -1710,7 +1710,7 @@
                 <a:ea typeface="MB Corpo S Text Office" pitchFamily="34" charset="-122"/>
                 <a:cs typeface="MB Corpo S Text Office" pitchFamily="34" charset="-120"/>
               </a:rPr>
-              <a:t>10.5 – 10.8 Closing and tracing</a:t>
+              <a:t>10.5 – 10.9 Ending and tracing</a:t>
             </a:r>
             <a:endParaRPr lang="en-US" sz="900" dirty="0"/>
           </a:p>
@@ -1795,6 +1795,27 @@
                 <a:cs typeface="MB Corpo S Text Office" pitchFamily="34" charset="-120"/>
               </a:rPr>
               <a:t>Change history and traceability</a:t>
+            </a:r>
+            <a:endParaRPr lang="en-US" sz="900" dirty="0"/>
+          </a:p>
+          <a:p>
+            <a:pPr marL="152400" indent="-152400">
+              <a:spcAft>
+                <a:spcPts val="100"/>
+              </a:spcAft>
+              <a:buSzPct val="100000"/>
+              <a:buChar char="•"/>
+            </a:pPr>
+            <a:r>
+              <a:rPr lang="en-US" sz="900" dirty="0">
+                <a:solidFill>
+                  <a:srgbClr val="262626"/>
+                </a:solidFill>
+                <a:latin typeface="MB Corpo S Text Office" pitchFamily="34" charset="0"/>
+                <a:ea typeface="MB Corpo S Text Office" pitchFamily="34" charset="-122"/>
+                <a:cs typeface="MB Corpo S Text Office" pitchFamily="34" charset="-120"/>
+              </a:rPr>
+              <a:t>Mileage, mileage history and projection</a:t>
             </a:r>
             <a:endParaRPr lang="en-US" sz="900" dirty="0"/>
           </a:p>
@@ -1816,7 +1837,7 @@
         </p:blipFill>
         <p:spPr>
           <a:xfrm>
-            <a:off x="201168" y="4544568"/>
+            <a:off x="201168" y="4846320"/>
             <a:ext cx="4663440" cy="1207008"/>
           </a:xfrm>
           <a:prstGeom prst="rect">
@@ -2243,7 +2264,7 @@
         <p:spPr>
           <a:xfrm>
             <a:off x="5065776" y="4645152"/>
-            <a:ext cx="4645152" cy="886968"/>
+            <a:ext cx="4645152" cy="1344168"/>
           </a:xfrm>
           <a:prstGeom prst="rect">
             <a:avLst/>
@@ -2449,6 +2470,72 @@
                 <a:cs typeface="MB Corpo S Text Office" pitchFamily="34" charset="-120"/>
               </a:rPr>
               <a:t> (10.8); every change is traceable with time, role and reason.</a:t>
+            </a:r>
+            <a:endParaRPr lang="en-US" sz="900" dirty="0"/>
+          </a:p>
+          <a:p>
+            <a:pPr marL="203200" indent="-203200">
+              <a:spcAft>
+                <a:spcPts val="400"/>
+              </a:spcAft>
+              <a:buSzPct val="100000"/>
+              <a:buFont typeface="+mj-lt"/>
+              <a:buAutoNum type="arabicPeriod" startAt="8"/>
+            </a:pPr>
+            <a:r>
+              <a:rPr lang="en-US" sz="900" dirty="0">
+                <a:solidFill>
+                  <a:srgbClr val="262626"/>
+                </a:solidFill>
+                <a:latin typeface="MB Corpo S Text Office" pitchFamily="34" charset="0"/>
+                <a:ea typeface="MB Corpo S Text Office" pitchFamily="34" charset="-122"/>
+                <a:cs typeface="MB Corpo S Text Office" pitchFamily="34" charset="-120"/>
+              </a:rPr>
+              <a:t>Check the </a:t>
+            </a:r>
+            <a:r>
+              <a:rPr lang="en-US" sz="900" b="1" dirty="0">
+                <a:solidFill>
+                  <a:srgbClr val="262626"/>
+                </a:solidFill>
+                <a:latin typeface="MB Corpo S Text Office" pitchFamily="34" charset="0"/>
+                <a:ea typeface="MB Corpo S Text Office" pitchFamily="34" charset="-122"/>
+                <a:cs typeface="MB Corpo S Text Office" pitchFamily="34" charset="-120"/>
+              </a:rPr>
+              <a:t>mileage history</a:t>
+            </a:r>
+            <a:r>
+              <a:rPr lang="en-US" sz="900" dirty="0">
+                <a:solidFill>
+                  <a:srgbClr val="262626"/>
+                </a:solidFill>
+                <a:latin typeface="MB Corpo S Text Office" pitchFamily="34" charset="0"/>
+                <a:ea typeface="MB Corpo S Text Office" pitchFamily="34" charset="-122"/>
+                <a:cs typeface="MB Corpo S Text Office" pitchFamily="34" charset="-120"/>
+              </a:rPr>
+              <a:t> and trigger the </a:t>
+            </a:r>
+            <a:r>
+              <a:rPr lang="en-US" sz="900" b="1" dirty="0">
+                <a:solidFill>
+                  <a:srgbClr val="262626"/>
+                </a:solidFill>
+                <a:latin typeface="MB Corpo S Text Office" pitchFamily="34" charset="0"/>
+                <a:ea typeface="MB Corpo S Text Office" pitchFamily="34" charset="-122"/>
+                <a:cs typeface="MB Corpo S Text Office" pitchFamily="34" charset="-120"/>
+              </a:rPr>
+              <a:t>mileage projection</a:t>
+            </a:r>
+            <a:r>
+              <a:rPr lang="en-US" sz="900" dirty="0">
+                <a:solidFill>
+                  <a:srgbClr val="262626"/>
+                </a:solidFill>
+                <a:latin typeface="MB Corpo S Text Office" pitchFamily="34" charset="0"/>
+                <a:ea typeface="MB Corpo S Text Office" pitchFamily="34" charset="-122"/>
+                <a:cs typeface="MB Corpo S Text Office" pitchFamily="34" charset="-120"/>
+              </a:rPr>
+              <a:t> when MIC data is missing (10.9); it is a reference value and does not end the contract.</a:t>
             </a:r>
             <a:endParaRPr lang="en-US" sz="900" dirty="0"/>
           </a:p>
@@ -3335,7 +3422,7 @@
                 <a:ea typeface="MB Corpo S Text Office" pitchFamily="34" charset="-122"/>
                 <a:cs typeface="MB Corpo S Text Office" pitchFamily="34" charset="-120"/>
               </a:rPr>
-              <a:t>Contract transfer requires a new registered keeper and identity of holder and registered keeper (Chapter 4.4).</a:t>
+              <a:t>A mileage from a workshop invoice above the contract mileage sets the status "expired by mileage" (10.6).</a:t>
             </a:r>
             <a:endParaRPr lang="en-US" sz="900" dirty="0"/>
           </a:p>
